--- a/DP-800/DP-800-Jour 1 - Session 4.pptx
+++ b/DP-800/DP-800-Jour 1 - Session 4.pptx
@@ -122,7 +122,7 @@
 <file path=ppt/revisionInfo.xml><?xml version="1.0" encoding="utf-8"?>
 <p1510:revInfo xmlns:a="http://schemas.openxmlformats.org/drawingml/2006/main" xmlns:r="http://schemas.openxmlformats.org/officeDocument/2006/relationships" xmlns:p1510="http://schemas.microsoft.com/office/powerpoint/2015/10/main">
   <p1510:revLst>
-    <p1510:client id="{018D0690-F230-4DFF-92C6-98A023134BAC}" v="2" dt="2026-07-28T13:39:28.615"/>
+    <p1510:client id="{018D0690-F230-4DFF-92C6-98A023134BAC}" v="4" dt="2026-07-29T15:40:12.271"/>
   </p1510:revLst>
 </p1510:revInfo>
 </file>
@@ -132,16 +132,24 @@
   <pc:docChgLst>
     <pc:chgData name="Rodrigue YENGO" userId="9019d928-c12d-48de-bdb2-52a833805ac2" providerId="ADAL" clId="{20734E0D-FF75-44B1-9DFF-D19DBB4D069A}"/>
     <pc:docChg chg="custSel modSld modMainMaster">
-      <pc:chgData name="Rodrigue YENGO" userId="9019d928-c12d-48de-bdb2-52a833805ac2" providerId="ADAL" clId="{20734E0D-FF75-44B1-9DFF-D19DBB4D069A}" dt="2026-07-28T14:02:38.842" v="39" actId="478"/>
+      <pc:chgData name="Rodrigue YENGO" userId="9019d928-c12d-48de-bdb2-52a833805ac2" providerId="ADAL" clId="{20734E0D-FF75-44B1-9DFF-D19DBB4D069A}" dt="2026-07-29T17:07:34.417" v="79" actId="22"/>
       <pc:docMkLst>
         <pc:docMk/>
       </pc:docMkLst>
-      <pc:sldChg chg="delSp modSp mod">
-        <pc:chgData name="Rodrigue YENGO" userId="9019d928-c12d-48de-bdb2-52a833805ac2" providerId="ADAL" clId="{20734E0D-FF75-44B1-9DFF-D19DBB4D069A}" dt="2026-07-28T14:02:01.858" v="32" actId="478"/>
+      <pc:sldChg chg="addSp delSp modSp mod">
+        <pc:chgData name="Rodrigue YENGO" userId="9019d928-c12d-48de-bdb2-52a833805ac2" providerId="ADAL" clId="{20734E0D-FF75-44B1-9DFF-D19DBB4D069A}" dt="2026-07-29T17:07:10.207" v="72" actId="21"/>
         <pc:sldMkLst>
           <pc:docMk/>
           <pc:sldMk cId="0" sldId="256"/>
         </pc:sldMkLst>
+        <pc:spChg chg="del">
+          <ac:chgData name="Rodrigue YENGO" userId="9019d928-c12d-48de-bdb2-52a833805ac2" providerId="ADAL" clId="{20734E0D-FF75-44B1-9DFF-D19DBB4D069A}" dt="2026-07-29T15:39:52.714" v="40" actId="478"/>
+          <ac:spMkLst>
+            <pc:docMk/>
+            <pc:sldMk cId="0" sldId="256"/>
+            <ac:spMk id="2" creationId="{00000000-0000-0000-0000-000000000000}"/>
+          </ac:spMkLst>
+        </pc:spChg>
         <pc:spChg chg="del mod">
           <ac:chgData name="Rodrigue YENGO" userId="9019d928-c12d-48de-bdb2-52a833805ac2" providerId="ADAL" clId="{20734E0D-FF75-44B1-9DFF-D19DBB4D069A}" dt="2026-07-28T14:02:01.858" v="32" actId="478"/>
           <ac:spMkLst>
@@ -166,30 +174,94 @@
             <ac:spMk id="5" creationId="{00000000-0000-0000-0000-000000000000}"/>
           </ac:spMkLst>
         </pc:spChg>
-        <pc:spChg chg="mod">
-          <ac:chgData name="Rodrigue YENGO" userId="9019d928-c12d-48de-bdb2-52a833805ac2" providerId="ADAL" clId="{20734E0D-FF75-44B1-9DFF-D19DBB4D069A}" dt="2026-07-28T13:39:25.488" v="4" actId="27636"/>
+        <pc:spChg chg="del mod">
+          <ac:chgData name="Rodrigue YENGO" userId="9019d928-c12d-48de-bdb2-52a833805ac2" providerId="ADAL" clId="{20734E0D-FF75-44B1-9DFF-D19DBB4D069A}" dt="2026-07-29T15:40:43.328" v="48" actId="478"/>
           <ac:spMkLst>
             <pc:docMk/>
             <pc:sldMk cId="0" sldId="256"/>
             <ac:spMk id="6" creationId="{00000000-0000-0000-0000-000000000000}"/>
           </ac:spMkLst>
         </pc:spChg>
-        <pc:spChg chg="mod">
-          <ac:chgData name="Rodrigue YENGO" userId="9019d928-c12d-48de-bdb2-52a833805ac2" providerId="ADAL" clId="{20734E0D-FF75-44B1-9DFF-D19DBB4D069A}" dt="2026-07-28T13:39:25.484" v="3" actId="27636"/>
+        <pc:spChg chg="del mod">
+          <ac:chgData name="Rodrigue YENGO" userId="9019d928-c12d-48de-bdb2-52a833805ac2" providerId="ADAL" clId="{20734E0D-FF75-44B1-9DFF-D19DBB4D069A}" dt="2026-07-29T15:40:43.328" v="48" actId="478"/>
           <ac:spMkLst>
             <pc:docMk/>
             <pc:sldMk cId="0" sldId="256"/>
             <ac:spMk id="7" creationId="{00000000-0000-0000-0000-000000000000}"/>
           </ac:spMkLst>
         </pc:spChg>
-        <pc:spChg chg="mod">
-          <ac:chgData name="Rodrigue YENGO" userId="9019d928-c12d-48de-bdb2-52a833805ac2" providerId="ADAL" clId="{20734E0D-FF75-44B1-9DFF-D19DBB4D069A}" dt="2026-07-28T13:39:25.479" v="1" actId="27636"/>
+        <pc:spChg chg="del mod">
+          <ac:chgData name="Rodrigue YENGO" userId="9019d928-c12d-48de-bdb2-52a833805ac2" providerId="ADAL" clId="{20734E0D-FF75-44B1-9DFF-D19DBB4D069A}" dt="2026-07-29T15:40:43.328" v="48" actId="478"/>
           <ac:spMkLst>
             <pc:docMk/>
             <pc:sldMk cId="0" sldId="256"/>
             <ac:spMk id="8" creationId="{00000000-0000-0000-0000-000000000000}"/>
           </ac:spMkLst>
         </pc:spChg>
+        <pc:spChg chg="mod">
+          <ac:chgData name="Rodrigue YENGO" userId="9019d928-c12d-48de-bdb2-52a833805ac2" providerId="ADAL" clId="{20734E0D-FF75-44B1-9DFF-D19DBB4D069A}" dt="2026-07-29T15:54:37.364" v="60" actId="207"/>
+          <ac:spMkLst>
+            <pc:docMk/>
+            <pc:sldMk cId="0" sldId="256"/>
+            <ac:spMk id="12" creationId="{92EC005E-A51E-314B-C40E-B8627D1DACCC}"/>
+          </ac:spMkLst>
+        </pc:spChg>
+        <pc:spChg chg="mod">
+          <ac:chgData name="Rodrigue YENGO" userId="9019d928-c12d-48de-bdb2-52a833805ac2" providerId="ADAL" clId="{20734E0D-FF75-44B1-9DFF-D19DBB4D069A}" dt="2026-07-29T15:54:37.364" v="60" actId="207"/>
+          <ac:spMkLst>
+            <pc:docMk/>
+            <pc:sldMk cId="0" sldId="256"/>
+            <ac:spMk id="13" creationId="{0D18C6EE-F748-E06B-E08B-DCD7B3FAA490}"/>
+          </ac:spMkLst>
+        </pc:spChg>
+        <pc:grpChg chg="add mod">
+          <ac:chgData name="Rodrigue YENGO" userId="9019d928-c12d-48de-bdb2-52a833805ac2" providerId="ADAL" clId="{20734E0D-FF75-44B1-9DFF-D19DBB4D069A}" dt="2026-07-29T15:39:53.805" v="41"/>
+          <ac:grpSpMkLst>
+            <pc:docMk/>
+            <pc:sldMk cId="0" sldId="256"/>
+            <ac:grpSpMk id="3" creationId="{3819C1F0-FCD7-8F6D-670C-3A5196018993}"/>
+          </ac:grpSpMkLst>
+        </pc:grpChg>
+        <pc:picChg chg="add del mod">
+          <ac:chgData name="Rodrigue YENGO" userId="9019d928-c12d-48de-bdb2-52a833805ac2" providerId="ADAL" clId="{20734E0D-FF75-44B1-9DFF-D19DBB4D069A}" dt="2026-07-29T17:04:53.221" v="66" actId="478"/>
+          <ac:picMkLst>
+            <pc:docMk/>
+            <pc:sldMk cId="0" sldId="256"/>
+            <ac:picMk id="6" creationId="{8D2C4BBD-4D25-C538-477C-3B0928B7510C}"/>
+          </ac:picMkLst>
+        </pc:picChg>
+        <pc:picChg chg="add del mod">
+          <ac:chgData name="Rodrigue YENGO" userId="9019d928-c12d-48de-bdb2-52a833805ac2" providerId="ADAL" clId="{20734E0D-FF75-44B1-9DFF-D19DBB4D069A}" dt="2026-07-29T17:07:10.207" v="72" actId="21"/>
+          <ac:picMkLst>
+            <pc:docMk/>
+            <pc:sldMk cId="0" sldId="256"/>
+            <ac:picMk id="8" creationId="{B4614EAC-5DA7-70DE-93B5-31AAE01ECD76}"/>
+          </ac:picMkLst>
+        </pc:picChg>
+        <pc:picChg chg="mod">
+          <ac:chgData name="Rodrigue YENGO" userId="9019d928-c12d-48de-bdb2-52a833805ac2" providerId="ADAL" clId="{20734E0D-FF75-44B1-9DFF-D19DBB4D069A}" dt="2026-07-29T15:39:53.805" v="41"/>
+          <ac:picMkLst>
+            <pc:docMk/>
+            <pc:sldMk cId="0" sldId="256"/>
+            <ac:picMk id="9" creationId="{6F549C2C-71AE-2F95-ED50-F28162AA48F7}"/>
+          </ac:picMkLst>
+        </pc:picChg>
+        <pc:picChg chg="mod">
+          <ac:chgData name="Rodrigue YENGO" userId="9019d928-c12d-48de-bdb2-52a833805ac2" providerId="ADAL" clId="{20734E0D-FF75-44B1-9DFF-D19DBB4D069A}" dt="2026-07-29T15:39:53.805" v="41"/>
+          <ac:picMkLst>
+            <pc:docMk/>
+            <pc:sldMk cId="0" sldId="256"/>
+            <ac:picMk id="10" creationId="{9B0CED60-6DFE-AE5E-6F5F-8D0DD17AF210}"/>
+          </ac:picMkLst>
+        </pc:picChg>
+        <pc:picChg chg="mod">
+          <ac:chgData name="Rodrigue YENGO" userId="9019d928-c12d-48de-bdb2-52a833805ac2" providerId="ADAL" clId="{20734E0D-FF75-44B1-9DFF-D19DBB4D069A}" dt="2026-07-29T15:39:53.805" v="41"/>
+          <ac:picMkLst>
+            <pc:docMk/>
+            <pc:sldMk cId="0" sldId="256"/>
+            <ac:picMk id="11" creationId="{31FBC999-89D9-2C86-98FA-6039E5884CE7}"/>
+          </ac:picMkLst>
+        </pc:picChg>
       </pc:sldChg>
       <pc:sldChg chg="delSp modSp mod">
         <pc:chgData name="Rodrigue YENGO" userId="9019d928-c12d-48de-bdb2-52a833805ac2" providerId="ADAL" clId="{20734E0D-FF75-44B1-9DFF-D19DBB4D069A}" dt="2026-07-28T14:02:16.093" v="34" actId="478"/>
@@ -247,11 +319,19 @@
         </pc:spChg>
       </pc:sldChg>
       <pc:sldChg chg="delSp modSp mod">
-        <pc:chgData name="Rodrigue YENGO" userId="9019d928-c12d-48de-bdb2-52a833805ac2" providerId="ADAL" clId="{20734E0D-FF75-44B1-9DFF-D19DBB4D069A}" dt="2026-07-28T14:02:20.423" v="35" actId="478"/>
+        <pc:chgData name="Rodrigue YENGO" userId="9019d928-c12d-48de-bdb2-52a833805ac2" providerId="ADAL" clId="{20734E0D-FF75-44B1-9DFF-D19DBB4D069A}" dt="2026-07-29T15:40:51.413" v="50" actId="478"/>
         <pc:sldMkLst>
           <pc:docMk/>
           <pc:sldMk cId="0" sldId="258"/>
         </pc:sldMkLst>
+        <pc:spChg chg="del">
+          <ac:chgData name="Rodrigue YENGO" userId="9019d928-c12d-48de-bdb2-52a833805ac2" providerId="ADAL" clId="{20734E0D-FF75-44B1-9DFF-D19DBB4D069A}" dt="2026-07-29T15:40:49.716" v="49" actId="478"/>
+          <ac:spMkLst>
+            <pc:docMk/>
+            <pc:sldMk cId="0" sldId="258"/>
+            <ac:spMk id="2" creationId="{00000000-0000-0000-0000-000000000000}"/>
+          </ac:spMkLst>
+        </pc:spChg>
         <pc:spChg chg="del mod">
           <ac:chgData name="Rodrigue YENGO" userId="9019d928-c12d-48de-bdb2-52a833805ac2" providerId="ADAL" clId="{20734E0D-FF75-44B1-9DFF-D19DBB4D069A}" dt="2026-07-28T14:02:20.423" v="35" actId="478"/>
           <ac:spMkLst>
@@ -284,13 +364,29 @@
             <ac:spMk id="7" creationId="{00000000-0000-0000-0000-000000000000}"/>
           </ac:spMkLst>
         </pc:spChg>
+        <pc:picChg chg="del">
+          <ac:chgData name="Rodrigue YENGO" userId="9019d928-c12d-48de-bdb2-52a833805ac2" providerId="ADAL" clId="{20734E0D-FF75-44B1-9DFF-D19DBB4D069A}" dt="2026-07-29T15:40:51.413" v="50" actId="478"/>
+          <ac:picMkLst>
+            <pc:docMk/>
+            <pc:sldMk cId="0" sldId="258"/>
+            <ac:picMk id="8" creationId="{00000000-0000-0000-0000-000000000000}"/>
+          </ac:picMkLst>
+        </pc:picChg>
       </pc:sldChg>
       <pc:sldChg chg="delSp modSp mod">
-        <pc:chgData name="Rodrigue YENGO" userId="9019d928-c12d-48de-bdb2-52a833805ac2" providerId="ADAL" clId="{20734E0D-FF75-44B1-9DFF-D19DBB4D069A}" dt="2026-07-28T14:02:24.868" v="36" actId="478"/>
+        <pc:chgData name="Rodrigue YENGO" userId="9019d928-c12d-48de-bdb2-52a833805ac2" providerId="ADAL" clId="{20734E0D-FF75-44B1-9DFF-D19DBB4D069A}" dt="2026-07-29T15:41:01.266" v="52" actId="478"/>
         <pc:sldMkLst>
           <pc:docMk/>
           <pc:sldMk cId="0" sldId="259"/>
         </pc:sldMkLst>
+        <pc:spChg chg="del">
+          <ac:chgData name="Rodrigue YENGO" userId="9019d928-c12d-48de-bdb2-52a833805ac2" providerId="ADAL" clId="{20734E0D-FF75-44B1-9DFF-D19DBB4D069A}" dt="2026-07-29T15:40:58.905" v="51" actId="478"/>
+          <ac:spMkLst>
+            <pc:docMk/>
+            <pc:sldMk cId="0" sldId="259"/>
+            <ac:spMk id="2" creationId="{00000000-0000-0000-0000-000000000000}"/>
+          </ac:spMkLst>
+        </pc:spChg>
         <pc:spChg chg="del mod">
           <ac:chgData name="Rodrigue YENGO" userId="9019d928-c12d-48de-bdb2-52a833805ac2" providerId="ADAL" clId="{20734E0D-FF75-44B1-9DFF-D19DBB4D069A}" dt="2026-07-28T14:02:24.868" v="36" actId="478"/>
           <ac:spMkLst>
@@ -331,13 +427,29 @@
             <ac:spMk id="9" creationId="{00000000-0000-0000-0000-000000000000}"/>
           </ac:spMkLst>
         </pc:spChg>
+        <pc:picChg chg="del">
+          <ac:chgData name="Rodrigue YENGO" userId="9019d928-c12d-48de-bdb2-52a833805ac2" providerId="ADAL" clId="{20734E0D-FF75-44B1-9DFF-D19DBB4D069A}" dt="2026-07-29T15:41:01.266" v="52" actId="478"/>
+          <ac:picMkLst>
+            <pc:docMk/>
+            <pc:sldMk cId="0" sldId="259"/>
+            <ac:picMk id="11" creationId="{00000000-0000-0000-0000-000000000000}"/>
+          </ac:picMkLst>
+        </pc:picChg>
       </pc:sldChg>
       <pc:sldChg chg="delSp modSp mod">
-        <pc:chgData name="Rodrigue YENGO" userId="9019d928-c12d-48de-bdb2-52a833805ac2" providerId="ADAL" clId="{20734E0D-FF75-44B1-9DFF-D19DBB4D069A}" dt="2026-07-28T14:02:29.747" v="37" actId="478"/>
+        <pc:chgData name="Rodrigue YENGO" userId="9019d928-c12d-48de-bdb2-52a833805ac2" providerId="ADAL" clId="{20734E0D-FF75-44B1-9DFF-D19DBB4D069A}" dt="2026-07-29T15:41:06.061" v="53" actId="478"/>
         <pc:sldMkLst>
           <pc:docMk/>
           <pc:sldMk cId="0" sldId="260"/>
         </pc:sldMkLst>
+        <pc:spChg chg="del">
+          <ac:chgData name="Rodrigue YENGO" userId="9019d928-c12d-48de-bdb2-52a833805ac2" providerId="ADAL" clId="{20734E0D-FF75-44B1-9DFF-D19DBB4D069A}" dt="2026-07-29T15:41:06.061" v="53" actId="478"/>
+          <ac:spMkLst>
+            <pc:docMk/>
+            <pc:sldMk cId="0" sldId="260"/>
+            <ac:spMk id="2" creationId="{00000000-0000-0000-0000-000000000000}"/>
+          </ac:spMkLst>
+        </pc:spChg>
         <pc:spChg chg="del mod">
           <ac:chgData name="Rodrigue YENGO" userId="9019d928-c12d-48de-bdb2-52a833805ac2" providerId="ADAL" clId="{20734E0D-FF75-44B1-9DFF-D19DBB4D069A}" dt="2026-07-28T14:02:29.747" v="37" actId="478"/>
           <ac:spMkLst>
@@ -356,11 +468,19 @@
         </pc:spChg>
       </pc:sldChg>
       <pc:sldChg chg="delSp modSp mod">
-        <pc:chgData name="Rodrigue YENGO" userId="9019d928-c12d-48de-bdb2-52a833805ac2" providerId="ADAL" clId="{20734E0D-FF75-44B1-9DFF-D19DBB4D069A}" dt="2026-07-28T14:02:35.147" v="38" actId="478"/>
+        <pc:chgData name="Rodrigue YENGO" userId="9019d928-c12d-48de-bdb2-52a833805ac2" providerId="ADAL" clId="{20734E0D-FF75-44B1-9DFF-D19DBB4D069A}" dt="2026-07-29T15:41:11.085" v="55" actId="478"/>
         <pc:sldMkLst>
           <pc:docMk/>
           <pc:sldMk cId="0" sldId="261"/>
         </pc:sldMkLst>
+        <pc:spChg chg="del">
+          <ac:chgData name="Rodrigue YENGO" userId="9019d928-c12d-48de-bdb2-52a833805ac2" providerId="ADAL" clId="{20734E0D-FF75-44B1-9DFF-D19DBB4D069A}" dt="2026-07-29T15:41:09.216" v="54" actId="478"/>
+          <ac:spMkLst>
+            <pc:docMk/>
+            <pc:sldMk cId="0" sldId="261"/>
+            <ac:spMk id="2" creationId="{00000000-0000-0000-0000-000000000000}"/>
+          </ac:spMkLst>
+        </pc:spChg>
         <pc:spChg chg="del mod">
           <ac:chgData name="Rodrigue YENGO" userId="9019d928-c12d-48de-bdb2-52a833805ac2" providerId="ADAL" clId="{20734E0D-FF75-44B1-9DFF-D19DBB4D069A}" dt="2026-07-28T14:02:35.147" v="38" actId="478"/>
           <ac:spMkLst>
@@ -377,9 +497,17 @@
             <ac:spMk id="4" creationId="{00000000-0000-0000-0000-000000000000}"/>
           </ac:spMkLst>
         </pc:spChg>
+        <pc:picChg chg="del">
+          <ac:chgData name="Rodrigue YENGO" userId="9019d928-c12d-48de-bdb2-52a833805ac2" providerId="ADAL" clId="{20734E0D-FF75-44B1-9DFF-D19DBB4D069A}" dt="2026-07-29T15:41:11.085" v="55" actId="478"/>
+          <ac:picMkLst>
+            <pc:docMk/>
+            <pc:sldMk cId="0" sldId="261"/>
+            <ac:picMk id="14" creationId="{00000000-0000-0000-0000-000000000000}"/>
+          </ac:picMkLst>
+        </pc:picChg>
       </pc:sldChg>
       <pc:sldChg chg="delSp modSp mod">
-        <pc:chgData name="Rodrigue YENGO" userId="9019d928-c12d-48de-bdb2-52a833805ac2" providerId="ADAL" clId="{20734E0D-FF75-44B1-9DFF-D19DBB4D069A}" dt="2026-07-28T14:02:38.842" v="39" actId="478"/>
+        <pc:chgData name="Rodrigue YENGO" userId="9019d928-c12d-48de-bdb2-52a833805ac2" providerId="ADAL" clId="{20734E0D-FF75-44B1-9DFF-D19DBB4D069A}" dt="2026-07-29T15:41:16.539" v="56" actId="478"/>
         <pc:sldMkLst>
           <pc:docMk/>
           <pc:sldMk cId="0" sldId="262"/>
@@ -400,13 +528,29 @@
             <ac:spMk id="4" creationId="{00000000-0000-0000-0000-000000000000}"/>
           </ac:spMkLst>
         </pc:spChg>
+        <pc:picChg chg="del">
+          <ac:chgData name="Rodrigue YENGO" userId="9019d928-c12d-48de-bdb2-52a833805ac2" providerId="ADAL" clId="{20734E0D-FF75-44B1-9DFF-D19DBB4D069A}" dt="2026-07-29T15:41:16.539" v="56" actId="478"/>
+          <ac:picMkLst>
+            <pc:docMk/>
+            <pc:sldMk cId="0" sldId="262"/>
+            <ac:picMk id="6" creationId="{00000000-0000-0000-0000-000000000000}"/>
+          </ac:picMkLst>
+        </pc:picChg>
       </pc:sldChg>
-      <pc:sldChg chg="modSp mod">
-        <pc:chgData name="Rodrigue YENGO" userId="9019d928-c12d-48de-bdb2-52a833805ac2" providerId="ADAL" clId="{20734E0D-FF75-44B1-9DFF-D19DBB4D069A}" dt="2026-07-28T13:39:25.698" v="28" actId="27636"/>
+      <pc:sldChg chg="delSp modSp mod">
+        <pc:chgData name="Rodrigue YENGO" userId="9019d928-c12d-48de-bdb2-52a833805ac2" providerId="ADAL" clId="{20734E0D-FF75-44B1-9DFF-D19DBB4D069A}" dt="2026-07-29T15:41:20.328" v="57" actId="478"/>
         <pc:sldMkLst>
           <pc:docMk/>
           <pc:sldMk cId="0" sldId="263"/>
         </pc:sldMkLst>
+        <pc:spChg chg="del">
+          <ac:chgData name="Rodrigue YENGO" userId="9019d928-c12d-48de-bdb2-52a833805ac2" providerId="ADAL" clId="{20734E0D-FF75-44B1-9DFF-D19DBB4D069A}" dt="2026-07-29T15:41:20.328" v="57" actId="478"/>
+          <ac:spMkLst>
+            <pc:docMk/>
+            <pc:sldMk cId="0" sldId="263"/>
+            <ac:spMk id="2" creationId="{00000000-0000-0000-0000-000000000000}"/>
+          </ac:spMkLst>
+        </pc:spChg>
         <pc:spChg chg="mod">
           <ac:chgData name="Rodrigue YENGO" userId="9019d928-c12d-48de-bdb2-52a833805ac2" providerId="ADAL" clId="{20734E0D-FF75-44B1-9DFF-D19DBB4D069A}" dt="2026-07-28T13:39:25.695" v="27" actId="27636"/>
           <ac:spMkLst>
@@ -424,22 +568,46 @@
           </ac:spMkLst>
         </pc:spChg>
       </pc:sldChg>
-      <pc:sldMasterChg chg="addSp mod modSldLayout">
-        <pc:chgData name="Rodrigue YENGO" userId="9019d928-c12d-48de-bdb2-52a833805ac2" providerId="ADAL" clId="{20734E0D-FF75-44B1-9DFF-D19DBB4D069A}" dt="2026-07-28T14:02:07.271" v="33" actId="22"/>
+      <pc:sldMasterChg chg="addSp delSp mod modSldLayout">
+        <pc:chgData name="Rodrigue YENGO" userId="9019d928-c12d-48de-bdb2-52a833805ac2" providerId="ADAL" clId="{20734E0D-FF75-44B1-9DFF-D19DBB4D069A}" dt="2026-07-29T17:07:34.417" v="79" actId="22"/>
         <pc:sldMasterMkLst>
           <pc:docMk/>
           <pc:sldMasterMk cId="0" sldId="2147483648"/>
         </pc:sldMasterMkLst>
-        <pc:picChg chg="add">
-          <ac:chgData name="Rodrigue YENGO" userId="9019d928-c12d-48de-bdb2-52a833805ac2" providerId="ADAL" clId="{20734E0D-FF75-44B1-9DFF-D19DBB4D069A}" dt="2026-07-28T13:40:32.271" v="29" actId="22"/>
+        <pc:picChg chg="add del">
+          <ac:chgData name="Rodrigue YENGO" userId="9019d928-c12d-48de-bdb2-52a833805ac2" providerId="ADAL" clId="{20734E0D-FF75-44B1-9DFF-D19DBB4D069A}" dt="2026-07-29T17:07:33.725" v="78" actId="478"/>
+          <ac:picMkLst>
+            <pc:docMk/>
+            <pc:sldMasterMk cId="0" sldId="2147483648"/>
+            <ac:picMk id="3" creationId="{6023B020-C1A1-94CE-4E6C-88D1001741C4}"/>
+          </ac:picMkLst>
+        </pc:picChg>
+        <pc:picChg chg="add del">
+          <ac:chgData name="Rodrigue YENGO" userId="9019d928-c12d-48de-bdb2-52a833805ac2" providerId="ADAL" clId="{20734E0D-FF75-44B1-9DFF-D19DBB4D069A}" dt="2026-07-29T15:54:18.021" v="58" actId="478"/>
           <ac:picMkLst>
             <pc:docMk/>
             <pc:sldMasterMk cId="0" sldId="2147483648"/>
             <ac:picMk id="3" creationId="{CF8CC0C4-B9FE-9F7F-C91F-3FD01C0FD3B3}"/>
           </ac:picMkLst>
         </pc:picChg>
-        <pc:sldLayoutChg chg="addSp mod">
-          <pc:chgData name="Rodrigue YENGO" userId="9019d928-c12d-48de-bdb2-52a833805ac2" providerId="ADAL" clId="{20734E0D-FF75-44B1-9DFF-D19DBB4D069A}" dt="2026-07-28T14:02:07.271" v="33" actId="22"/>
+        <pc:picChg chg="add">
+          <ac:chgData name="Rodrigue YENGO" userId="9019d928-c12d-48de-bdb2-52a833805ac2" providerId="ADAL" clId="{20734E0D-FF75-44B1-9DFF-D19DBB4D069A}" dt="2026-07-29T15:54:18.833" v="59" actId="22"/>
+          <ac:picMkLst>
+            <pc:docMk/>
+            <pc:sldMasterMk cId="0" sldId="2147483648"/>
+            <ac:picMk id="4" creationId="{50D5F170-B697-D084-F6CC-42CB5424D3D0}"/>
+          </ac:picMkLst>
+        </pc:picChg>
+        <pc:picChg chg="add">
+          <ac:chgData name="Rodrigue YENGO" userId="9019d928-c12d-48de-bdb2-52a833805ac2" providerId="ADAL" clId="{20734E0D-FF75-44B1-9DFF-D19DBB4D069A}" dt="2026-07-29T17:07:34.417" v="79" actId="22"/>
+          <ac:picMkLst>
+            <pc:docMk/>
+            <pc:sldMasterMk cId="0" sldId="2147483648"/>
+            <ac:picMk id="6" creationId="{17F505BC-18F3-BAD0-2BA4-EA7726B9CB97}"/>
+          </ac:picMkLst>
+        </pc:picChg>
+        <pc:sldLayoutChg chg="addSp delSp modSp mod setBg">
+          <pc:chgData name="Rodrigue YENGO" userId="9019d928-c12d-48de-bdb2-52a833805ac2" providerId="ADAL" clId="{20734E0D-FF75-44B1-9DFF-D19DBB4D069A}" dt="2026-07-29T17:07:30.128" v="77" actId="21"/>
           <pc:sldLayoutMkLst>
             <pc:docMk/>
             <pc:sldMasterMk cId="0" sldId="2147483648"/>
@@ -454,6 +622,51 @@
               <ac:spMk id="3" creationId="{62898836-E8E7-9E63-152F-615D463BA987}"/>
             </ac:spMkLst>
           </pc:spChg>
+          <pc:spChg chg="add mod">
+            <ac:chgData name="Rodrigue YENGO" userId="9019d928-c12d-48de-bdb2-52a833805ac2" providerId="ADAL" clId="{20734E0D-FF75-44B1-9DFF-D19DBB4D069A}" dt="2026-07-29T15:40:30.586" v="47" actId="255"/>
+            <ac:spMkLst>
+              <pc:docMk/>
+              <pc:sldMasterMk cId="0" sldId="2147483648"/>
+              <pc:sldLayoutMk cId="0" sldId="2147483649"/>
+              <ac:spMk id="4" creationId="{A1DEE29E-CCB2-C551-3406-F49902394D0C}"/>
+            </ac:spMkLst>
+          </pc:spChg>
+          <pc:spChg chg="add mod">
+            <ac:chgData name="Rodrigue YENGO" userId="9019d928-c12d-48de-bdb2-52a833805ac2" providerId="ADAL" clId="{20734E0D-FF75-44B1-9DFF-D19DBB4D069A}" dt="2026-07-29T15:40:30.586" v="47" actId="255"/>
+            <ac:spMkLst>
+              <pc:docMk/>
+              <pc:sldMasterMk cId="0" sldId="2147483648"/>
+              <pc:sldLayoutMk cId="0" sldId="2147483649"/>
+              <ac:spMk id="6" creationId="{1085289C-85A0-455F-F3BC-6FD5F734AF1E}"/>
+            </ac:spMkLst>
+          </pc:spChg>
+          <pc:spChg chg="add mod">
+            <ac:chgData name="Rodrigue YENGO" userId="9019d928-c12d-48de-bdb2-52a833805ac2" providerId="ADAL" clId="{20734E0D-FF75-44B1-9DFF-D19DBB4D069A}" dt="2026-07-29T15:40:30.586" v="47" actId="255"/>
+            <ac:spMkLst>
+              <pc:docMk/>
+              <pc:sldMasterMk cId="0" sldId="2147483648"/>
+              <pc:sldLayoutMk cId="0" sldId="2147483649"/>
+              <ac:spMk id="8" creationId="{4B4B9844-F27D-9C9B-70B4-168DD9FFAA35}"/>
+            </ac:spMkLst>
+          </pc:spChg>
+          <pc:picChg chg="add del">
+            <ac:chgData name="Rodrigue YENGO" userId="9019d928-c12d-48de-bdb2-52a833805ac2" providerId="ADAL" clId="{20734E0D-FF75-44B1-9DFF-D19DBB4D069A}" dt="2026-07-29T17:04:04.250" v="62" actId="478"/>
+            <ac:picMkLst>
+              <pc:docMk/>
+              <pc:sldMasterMk cId="0" sldId="2147483648"/>
+              <pc:sldLayoutMk cId="0" sldId="2147483649"/>
+              <ac:picMk id="5" creationId="{335E17D5-CB53-5CB0-5D2F-B7AC01512D5F}"/>
+            </ac:picMkLst>
+          </pc:picChg>
+          <pc:picChg chg="add del mod">
+            <ac:chgData name="Rodrigue YENGO" userId="9019d928-c12d-48de-bdb2-52a833805ac2" providerId="ADAL" clId="{20734E0D-FF75-44B1-9DFF-D19DBB4D069A}" dt="2026-07-29T17:07:30.128" v="77" actId="21"/>
+            <ac:picMkLst>
+              <pc:docMk/>
+              <pc:sldMasterMk cId="0" sldId="2147483648"/>
+              <pc:sldLayoutMk cId="0" sldId="2147483649"/>
+              <ac:picMk id="9" creationId="{ABEA1ACC-E7A6-2E70-F8F0-8B824772E102}"/>
+            </ac:picMkLst>
+          </pc:picChg>
         </pc:sldLayoutChg>
       </pc:sldMasterChg>
     </pc:docChg>
@@ -1339,10 +1552,166 @@
           </a:p>
         </p:txBody>
       </p:sp>
+      <p:sp>
+        <p:nvSpPr>
+          <p:cNvPr id="4" name="Text 4">
+            <a:extLst>
+              <a:ext uri="{FF2B5EF4-FFF2-40B4-BE49-F238E27FC236}">
+                <a16:creationId xmlns:a16="http://schemas.microsoft.com/office/drawing/2014/main" id="{A1DEE29E-CCB2-C551-3406-F49902394D0C}"/>
+              </a:ext>
+            </a:extLst>
+          </p:cNvPr>
+          <p:cNvSpPr/>
+          <p:nvPr userDrawn="1"/>
+        </p:nvSpPr>
+        <p:spPr>
+          <a:xfrm>
+            <a:off x="1143000" y="9296399"/>
+            <a:ext cx="3245078" cy="515815"/>
+          </a:xfrm>
+          <a:prstGeom prst="rect">
+            <a:avLst/>
+          </a:prstGeom>
+          <a:noFill/>
+          <a:ln/>
+        </p:spPr>
+        <p:txBody>
+          <a:bodyPr wrap="square" lIns="25400" tIns="25400" rIns="25400" bIns="25400" rtlCol="0" anchor="t">
+            <a:noAutofit/>
+          </a:bodyPr>
+          <a:lstStyle/>
+          <a:p>
+            <a:pPr marL="0" indent="0" algn="l">
+              <a:lnSpc>
+                <a:spcPct val="131154"/>
+              </a:lnSpc>
+              <a:buNone/>
+            </a:pPr>
+            <a:r>
+              <a:rPr lang="en-US" sz="1600" dirty="0">
+                <a:solidFill>
+                  <a:srgbClr val="E9E9ED">
+                    <a:alpha val="55000"/>
+                  </a:srgbClr>
+                </a:solidFill>
+                <a:latin typeface="Arial" pitchFamily="34" charset="0"/>
+                <a:ea typeface="Arial" pitchFamily="34" charset="-122"/>
+                <a:cs typeface="Arial" pitchFamily="34" charset="-120"/>
+              </a:rPr>
+              <a:t>Data &amp; AI France Study Group</a:t>
+            </a:r>
+            <a:endParaRPr lang="en-US" sz="1600" dirty="0"/>
+          </a:p>
+        </p:txBody>
+      </p:sp>
+      <p:sp>
+        <p:nvSpPr>
+          <p:cNvPr id="6" name="Text 5">
+            <a:extLst>
+              <a:ext uri="{FF2B5EF4-FFF2-40B4-BE49-F238E27FC236}">
+                <a16:creationId xmlns:a16="http://schemas.microsoft.com/office/drawing/2014/main" id="{1085289C-85A0-455F-F3BC-6FD5F734AF1E}"/>
+              </a:ext>
+            </a:extLst>
+          </p:cNvPr>
+          <p:cNvSpPr/>
+          <p:nvPr userDrawn="1"/>
+        </p:nvSpPr>
+        <p:spPr>
+          <a:xfrm>
+            <a:off x="4264521" y="9296399"/>
+            <a:ext cx="136624" cy="515815"/>
+          </a:xfrm>
+          <a:prstGeom prst="rect">
+            <a:avLst/>
+          </a:prstGeom>
+          <a:noFill/>
+          <a:ln/>
+        </p:spPr>
+        <p:txBody>
+          <a:bodyPr wrap="square" lIns="25400" tIns="25400" rIns="25400" bIns="25400" rtlCol="0" anchor="t">
+            <a:noAutofit/>
+          </a:bodyPr>
+          <a:lstStyle/>
+          <a:p>
+            <a:pPr marL="0" indent="0" algn="l">
+              <a:lnSpc>
+                <a:spcPct val="131154"/>
+              </a:lnSpc>
+              <a:buNone/>
+            </a:pPr>
+            <a:r>
+              <a:rPr lang="en-US" sz="1600" dirty="0">
+                <a:solidFill>
+                  <a:srgbClr val="E9E9ED">
+                    <a:alpha val="55000"/>
+                  </a:srgbClr>
+                </a:solidFill>
+                <a:latin typeface="Arial" pitchFamily="34" charset="0"/>
+                <a:ea typeface="Arial" pitchFamily="34" charset="-122"/>
+                <a:cs typeface="Arial" pitchFamily="34" charset="-120"/>
+              </a:rPr>
+              <a:t>·</a:t>
+            </a:r>
+            <a:endParaRPr lang="en-US" sz="1600" dirty="0"/>
+          </a:p>
+        </p:txBody>
+      </p:sp>
+      <p:sp>
+        <p:nvSpPr>
+          <p:cNvPr id="8" name="Text 6">
+            <a:extLst>
+              <a:ext uri="{FF2B5EF4-FFF2-40B4-BE49-F238E27FC236}">
+                <a16:creationId xmlns:a16="http://schemas.microsoft.com/office/drawing/2014/main" id="{4B4B9844-F27D-9C9B-70B4-168DD9FFAA35}"/>
+              </a:ext>
+            </a:extLst>
+          </p:cNvPr>
+          <p:cNvSpPr/>
+          <p:nvPr userDrawn="1"/>
+        </p:nvSpPr>
+        <p:spPr>
+          <a:xfrm>
+            <a:off x="4496395" y="9296399"/>
+            <a:ext cx="2313072" cy="515815"/>
+          </a:xfrm>
+          <a:prstGeom prst="rect">
+            <a:avLst/>
+          </a:prstGeom>
+          <a:noFill/>
+          <a:ln/>
+        </p:spPr>
+        <p:txBody>
+          <a:bodyPr wrap="square" lIns="25400" tIns="25400" rIns="25400" bIns="25400" rtlCol="0" anchor="t">
+            <a:noAutofit/>
+          </a:bodyPr>
+          <a:lstStyle/>
+          <a:p>
+            <a:pPr marL="0" indent="0" algn="l">
+              <a:lnSpc>
+                <a:spcPct val="131154"/>
+              </a:lnSpc>
+              <a:buNone/>
+            </a:pPr>
+            <a:r>
+              <a:rPr lang="en-US" sz="1600" dirty="0">
+                <a:solidFill>
+                  <a:srgbClr val="E9E9ED">
+                    <a:alpha val="55000"/>
+                  </a:srgbClr>
+                </a:solidFill>
+                <a:latin typeface="Arial" pitchFamily="34" charset="0"/>
+                <a:ea typeface="Arial" pitchFamily="34" charset="-122"/>
+                <a:cs typeface="Arial" pitchFamily="34" charset="-120"/>
+              </a:rPr>
+              <a:t>Data Days — DP-800</a:t>
+            </a:r>
+            <a:endParaRPr lang="en-US" sz="1600" dirty="0"/>
+          </a:p>
+        </p:txBody>
+      </p:sp>
     </p:spTree>
   </p:cSld>
   <p:clrMapOvr>
-    <a:masterClrMapping/>
+    <a:overrideClrMapping bg1="dk1" tx1="lt1" bg2="dk2" tx2="lt2" accent1="accent1" accent2="accent2" accent3="accent3" accent4="accent4" accent5="accent5" accent6="accent6" hlink="hlink" folHlink="folHlink"/>
   </p:clrMapOvr>
 </p:sldLayout>
 </file>
@@ -1371,10 +1740,10 @@
       </p:grpSpPr>
       <p:pic>
         <p:nvPicPr>
-          <p:cNvPr id="3" name="Image 2">
+          <p:cNvPr id="4" name="Image 3">
             <a:extLst>
               <a:ext uri="{FF2B5EF4-FFF2-40B4-BE49-F238E27FC236}">
-                <a16:creationId xmlns:a16="http://schemas.microsoft.com/office/drawing/2014/main" id="{CF8CC0C4-B9FE-9F7F-C91F-3FD01C0FD3B3}"/>
+                <a16:creationId xmlns:a16="http://schemas.microsoft.com/office/drawing/2014/main" id="{50D5F170-B697-D084-F6CC-42CB5424D3D0}"/>
               </a:ext>
             </a:extLst>
           </p:cNvPr>
@@ -1391,8 +1760,38 @@
         </p:blipFill>
         <p:spPr>
           <a:xfrm>
-            <a:off x="16205200" y="194732"/>
-            <a:ext cx="2222500" cy="1481667"/>
+            <a:off x="16732737" y="194733"/>
+            <a:ext cx="1694962" cy="1129975"/>
+          </a:xfrm>
+          <a:prstGeom prst="rect">
+            <a:avLst/>
+          </a:prstGeom>
+        </p:spPr>
+      </p:pic>
+      <p:pic>
+        <p:nvPicPr>
+          <p:cNvPr id="6" name="Image 5">
+            <a:extLst>
+              <a:ext uri="{FF2B5EF4-FFF2-40B4-BE49-F238E27FC236}">
+                <a16:creationId xmlns:a16="http://schemas.microsoft.com/office/drawing/2014/main" id="{17F505BC-18F3-BAD0-2BA4-EA7726B9CB97}"/>
+              </a:ext>
+            </a:extLst>
+          </p:cNvPr>
+          <p:cNvPicPr>
+            <a:picLocks noChangeAspect="1"/>
+          </p:cNvPicPr>
+          <p:nvPr userDrawn="1"/>
+        </p:nvPicPr>
+        <p:blipFill>
+          <a:blip r:embed="rId4"/>
+          <a:stretch>
+            <a:fillRect/>
+          </a:stretch>
+        </p:blipFill>
+        <p:spPr>
+          <a:xfrm>
+            <a:off x="1218000" y="8316939"/>
+            <a:ext cx="2951271" cy="1141158"/>
           </a:xfrm>
           <a:prstGeom prst="rect">
             <a:avLst/>
@@ -1686,47 +2085,6 @@
       </p:grpSpPr>
       <p:sp>
         <p:nvSpPr>
-          <p:cNvPr id="2" name="Shape 0"/>
-          <p:cNvSpPr/>
-          <p:nvPr/>
-        </p:nvSpPr>
-        <p:spPr>
-          <a:xfrm>
-            <a:off x="0" y="0"/>
-            <a:ext cx="18288000" cy="10287000"/>
-          </a:xfrm>
-          <a:prstGeom prst="rect">
-            <a:avLst/>
-          </a:prstGeom>
-          <a:gradFill rotWithShape="1">
-            <a:gsLst>
-              <a:gs pos="0">
-                <a:srgbClr val="2B2741">
-                  <a:alpha val="75000"/>
-                </a:srgbClr>
-              </a:gs>
-              <a:gs pos="58000">
-                <a:srgbClr val="2B2741">
-                  <a:alpha val="0"/>
-                </a:srgbClr>
-              </a:gs>
-            </a:gsLst>
-            <a:path path="circle">
-              <a:fillToRect l="80000" r="20000" b="100000"/>
-            </a:path>
-          </a:gradFill>
-          <a:ln/>
-        </p:spPr>
-        <p:txBody>
-          <a:bodyPr/>
-          <a:lstStyle/>
-          <a:p>
-            <a:endParaRPr lang="en-GB"/>
-          </a:p>
-        </p:txBody>
-      </p:sp>
-      <p:sp>
-        <p:nvSpPr>
           <p:cNvPr id="4" name="Text 2"/>
           <p:cNvSpPr/>
           <p:nvPr/>
@@ -1813,144 +2171,240 @@
           </a:p>
         </p:txBody>
       </p:sp>
-      <p:sp>
-        <p:nvSpPr>
-          <p:cNvPr id="6" name="Text 4"/>
-          <p:cNvSpPr/>
+      <p:grpSp>
+        <p:nvGrpSpPr>
+          <p:cNvPr id="3" name="Groupe 2">
+            <a:extLst>
+              <a:ext uri="{FF2B5EF4-FFF2-40B4-BE49-F238E27FC236}">
+                <a16:creationId xmlns:a16="http://schemas.microsoft.com/office/drawing/2014/main" id="{3819C1F0-FCD7-8F6D-670C-3A5196018993}"/>
+              </a:ext>
+            </a:extLst>
+          </p:cNvPr>
+          <p:cNvGrpSpPr/>
           <p:nvPr/>
-        </p:nvSpPr>
-        <p:spPr>
+        </p:nvGrpSpPr>
+        <p:grpSpPr>
           <a:xfrm>
-            <a:off x="1143000" y="9296400"/>
-            <a:ext cx="3245078" cy="190500"/>
+            <a:off x="10310563" y="561196"/>
+            <a:ext cx="6990490" cy="8735204"/>
+            <a:chOff x="11002220" y="561196"/>
+            <a:chExt cx="6990490" cy="8735204"/>
           </a:xfrm>
-          <a:prstGeom prst="rect">
-            <a:avLst/>
-          </a:prstGeom>
-          <a:noFill/>
-          <a:ln/>
-        </p:spPr>
-        <p:txBody>
-          <a:bodyPr wrap="square" lIns="25400" tIns="25400" rIns="25400" bIns="25400" rtlCol="0" anchor="t">
-            <a:normAutofit fontScale="47500" lnSpcReduction="20000"/>
-          </a:bodyPr>
-          <a:lstStyle/>
-          <a:p>
-            <a:pPr marL="0" indent="0" algn="l">
-              <a:lnSpc>
-                <a:spcPct val="131154"/>
-              </a:lnSpc>
-              <a:buNone/>
-            </a:pPr>
-            <a:r>
-              <a:rPr lang="en-US" sz="1650" dirty="0">
-                <a:solidFill>
-                  <a:srgbClr val="E9E9ED">
-                    <a:alpha val="55000"/>
-                  </a:srgbClr>
-                </a:solidFill>
-                <a:latin typeface="Arial" pitchFamily="34" charset="0"/>
-                <a:ea typeface="Arial" pitchFamily="34" charset="-122"/>
-                <a:cs typeface="Arial" pitchFamily="34" charset="-120"/>
-              </a:rPr>
-              <a:t>Data &amp; AI France Study Group</a:t>
-            </a:r>
-            <a:endParaRPr lang="en-US" sz="1650" dirty="0"/>
-          </a:p>
-        </p:txBody>
-      </p:sp>
-      <p:sp>
-        <p:nvSpPr>
-          <p:cNvPr id="7" name="Text 5"/>
-          <p:cNvSpPr/>
-          <p:nvPr/>
-        </p:nvSpPr>
-        <p:spPr>
-          <a:xfrm>
-            <a:off x="4264521" y="9296400"/>
-            <a:ext cx="136624" cy="190500"/>
-          </a:xfrm>
-          <a:prstGeom prst="rect">
-            <a:avLst/>
-          </a:prstGeom>
-          <a:noFill/>
-          <a:ln/>
-        </p:spPr>
-        <p:txBody>
-          <a:bodyPr wrap="square" lIns="25400" tIns="25400" rIns="25400" bIns="25400" rtlCol="0" anchor="t">
-            <a:normAutofit fontScale="47500" lnSpcReduction="20000"/>
-          </a:bodyPr>
-          <a:lstStyle/>
-          <a:p>
-            <a:pPr marL="0" indent="0" algn="l">
-              <a:lnSpc>
-                <a:spcPct val="131154"/>
-              </a:lnSpc>
-              <a:buNone/>
-            </a:pPr>
-            <a:r>
-              <a:rPr lang="en-US" sz="1650" dirty="0">
-                <a:solidFill>
-                  <a:srgbClr val="E9E9ED">
-                    <a:alpha val="55000"/>
-                  </a:srgbClr>
-                </a:solidFill>
-                <a:latin typeface="Arial" pitchFamily="34" charset="0"/>
-                <a:ea typeface="Arial" pitchFamily="34" charset="-122"/>
-                <a:cs typeface="Arial" pitchFamily="34" charset="-120"/>
-              </a:rPr>
-              <a:t>·</a:t>
-            </a:r>
-            <a:endParaRPr lang="en-US" sz="1650" dirty="0"/>
-          </a:p>
-        </p:txBody>
-      </p:sp>
-      <p:sp>
-        <p:nvSpPr>
-          <p:cNvPr id="8" name="Text 6"/>
-          <p:cNvSpPr/>
-          <p:nvPr/>
-        </p:nvSpPr>
-        <p:spPr>
-          <a:xfrm>
-            <a:off x="4496395" y="9296400"/>
-            <a:ext cx="2313072" cy="190500"/>
-          </a:xfrm>
-          <a:prstGeom prst="rect">
-            <a:avLst/>
-          </a:prstGeom>
-          <a:noFill/>
-          <a:ln/>
-        </p:spPr>
-        <p:txBody>
-          <a:bodyPr wrap="square" lIns="25400" tIns="25400" rIns="25400" bIns="25400" rtlCol="0" anchor="t">
-            <a:normAutofit fontScale="47500" lnSpcReduction="20000"/>
-          </a:bodyPr>
-          <a:lstStyle/>
-          <a:p>
-            <a:pPr marL="0" indent="0" algn="l">
-              <a:lnSpc>
-                <a:spcPct val="131154"/>
-              </a:lnSpc>
-              <a:buNone/>
-            </a:pPr>
-            <a:r>
-              <a:rPr lang="en-US" sz="1650" dirty="0">
-                <a:solidFill>
-                  <a:srgbClr val="E9E9ED">
-                    <a:alpha val="55000"/>
-                  </a:srgbClr>
-                </a:solidFill>
-                <a:latin typeface="Arial" pitchFamily="34" charset="0"/>
-                <a:ea typeface="Arial" pitchFamily="34" charset="-122"/>
-                <a:cs typeface="Arial" pitchFamily="34" charset="-120"/>
-              </a:rPr>
-              <a:t>Data Days — DP-800</a:t>
-            </a:r>
-            <a:endParaRPr lang="en-US" sz="1650" dirty="0"/>
-          </a:p>
-        </p:txBody>
-      </p:sp>
+        </p:grpSpPr>
+        <p:pic>
+          <p:nvPicPr>
+            <p:cNvPr id="9" name="Image 8">
+              <a:extLst>
+                <a:ext uri="{FF2B5EF4-FFF2-40B4-BE49-F238E27FC236}">
+                  <a16:creationId xmlns:a16="http://schemas.microsoft.com/office/drawing/2014/main" id="{6F549C2C-71AE-2F95-ED50-F28162AA48F7}"/>
+                </a:ext>
+              </a:extLst>
+            </p:cNvPr>
+            <p:cNvPicPr>
+              <a:picLocks noChangeAspect="1"/>
+            </p:cNvPicPr>
+            <p:nvPr/>
+          </p:nvPicPr>
+          <p:blipFill>
+            <a:blip r:embed="rId3"/>
+            <a:stretch>
+              <a:fillRect/>
+            </a:stretch>
+          </p:blipFill>
+          <p:spPr>
+            <a:xfrm>
+              <a:off x="11002220" y="4636074"/>
+              <a:ext cx="6990490" cy="4660326"/>
+            </a:xfrm>
+            <a:prstGeom prst="rect">
+              <a:avLst/>
+            </a:prstGeom>
+          </p:spPr>
+        </p:pic>
+        <p:pic>
+          <p:nvPicPr>
+            <p:cNvPr id="10" name="Image 9">
+              <a:extLst>
+                <a:ext uri="{FF2B5EF4-FFF2-40B4-BE49-F238E27FC236}">
+                  <a16:creationId xmlns:a16="http://schemas.microsoft.com/office/drawing/2014/main" id="{9B0CED60-6DFE-AE5E-6F5F-8D0DD17AF210}"/>
+                </a:ext>
+              </a:extLst>
+            </p:cNvPr>
+            <p:cNvPicPr>
+              <a:picLocks noChangeAspect="1"/>
+            </p:cNvPicPr>
+            <p:nvPr/>
+          </p:nvPicPr>
+          <p:blipFill>
+            <a:blip r:embed="rId4"/>
+            <a:stretch>
+              <a:fillRect/>
+            </a:stretch>
+          </p:blipFill>
+          <p:spPr>
+            <a:xfrm>
+              <a:off x="14823713" y="565257"/>
+              <a:ext cx="2808967" cy="2808967"/>
+            </a:xfrm>
+            <a:prstGeom prst="ellipse">
+              <a:avLst/>
+            </a:prstGeom>
+            <a:ln w="3175" cap="rnd">
+              <a:solidFill>
+                <a:srgbClr val="C8C6BD"/>
+              </a:solidFill>
+              <a:prstDash val="solid"/>
+            </a:ln>
+            <a:effectLst>
+              <a:outerShdw blurRad="127000" algn="bl" rotWithShape="0">
+                <a:srgbClr val="000000"/>
+              </a:outerShdw>
+            </a:effectLst>
+            <a:scene3d>
+              <a:camera prst="perspectiveFront" fov="5400000"/>
+              <a:lightRig rig="threePt" dir="t">
+                <a:rot lat="0" lon="0" rev="19200000"/>
+              </a:lightRig>
+            </a:scene3d>
+            <a:sp3d extrusionH="25400">
+              <a:bevelT w="304800" h="152400" prst="hardEdge"/>
+              <a:extrusionClr>
+                <a:srgbClr val="000000"/>
+              </a:extrusionClr>
+            </a:sp3d>
+          </p:spPr>
+        </p:pic>
+        <p:pic>
+          <p:nvPicPr>
+            <p:cNvPr id="11" name="Image 10">
+              <a:extLst>
+                <a:ext uri="{FF2B5EF4-FFF2-40B4-BE49-F238E27FC236}">
+                  <a16:creationId xmlns:a16="http://schemas.microsoft.com/office/drawing/2014/main" id="{31FBC999-89D9-2C86-98FA-6039E5884CE7}"/>
+                </a:ext>
+              </a:extLst>
+            </p:cNvPr>
+            <p:cNvPicPr>
+              <a:picLocks noChangeAspect="1"/>
+            </p:cNvPicPr>
+            <p:nvPr/>
+          </p:nvPicPr>
+          <p:blipFill>
+            <a:blip r:embed="rId5"/>
+            <a:stretch>
+              <a:fillRect/>
+            </a:stretch>
+          </p:blipFill>
+          <p:spPr>
+            <a:xfrm>
+              <a:off x="11636328" y="561196"/>
+              <a:ext cx="2807208" cy="2807208"/>
+            </a:xfrm>
+            <a:prstGeom prst="ellipse">
+              <a:avLst/>
+            </a:prstGeom>
+            <a:ln w="3175" cap="rnd">
+              <a:solidFill>
+                <a:srgbClr val="C8C6BD"/>
+              </a:solidFill>
+              <a:prstDash val="solid"/>
+            </a:ln>
+            <a:effectLst>
+              <a:outerShdw blurRad="127000" algn="bl" rotWithShape="0">
+                <a:srgbClr val="000000"/>
+              </a:outerShdw>
+            </a:effectLst>
+            <a:scene3d>
+              <a:camera prst="perspectiveFront" fov="5400000"/>
+              <a:lightRig rig="threePt" dir="t">
+                <a:rot lat="0" lon="0" rev="19200000"/>
+              </a:lightRig>
+            </a:scene3d>
+            <a:sp3d extrusionH="25400">
+              <a:bevelT w="304800" h="152400" prst="hardEdge"/>
+              <a:extrusionClr>
+                <a:srgbClr val="000000"/>
+              </a:extrusionClr>
+            </a:sp3d>
+          </p:spPr>
+        </p:pic>
+        <p:sp>
+          <p:nvSpPr>
+            <p:cNvPr id="12" name="ZoneTexte 11">
+              <a:extLst>
+                <a:ext uri="{FF2B5EF4-FFF2-40B4-BE49-F238E27FC236}">
+                  <a16:creationId xmlns:a16="http://schemas.microsoft.com/office/drawing/2014/main" id="{92EC005E-A51E-314B-C40E-B8627D1DACCC}"/>
+                </a:ext>
+              </a:extLst>
+            </p:cNvPr>
+            <p:cNvSpPr txBox="1"/>
+            <p:nvPr/>
+          </p:nvSpPr>
+          <p:spPr>
+            <a:xfrm>
+              <a:off x="14889480" y="3668223"/>
+              <a:ext cx="2743200" cy="461665"/>
+            </a:xfrm>
+            <a:prstGeom prst="rect">
+              <a:avLst/>
+            </a:prstGeom>
+            <a:noFill/>
+          </p:spPr>
+          <p:txBody>
+            <a:bodyPr wrap="square">
+              <a:spAutoFit/>
+            </a:bodyPr>
+            <a:lstStyle/>
+            <a:p>
+              <a:pPr lvl="0"/>
+              <a:r>
+                <a:rPr lang="en-US" sz="2400" i="0" kern="1200" dirty="0">
+                  <a:effectLst/>
+                  <a:latin typeface="+mn-lt"/>
+                  <a:ea typeface="+mn-ea"/>
+                  <a:cs typeface="+mn-cs"/>
+                </a:rPr>
+                <a:t>Abdelhak BENYAHIA</a:t>
+              </a:r>
+            </a:p>
+          </p:txBody>
+        </p:sp>
+        <p:sp>
+          <p:nvSpPr>
+            <p:cNvPr id="13" name="ZoneTexte 12">
+              <a:extLst>
+                <a:ext uri="{FF2B5EF4-FFF2-40B4-BE49-F238E27FC236}">
+                  <a16:creationId xmlns:a16="http://schemas.microsoft.com/office/drawing/2014/main" id="{0D18C6EE-F748-E06B-E08B-DCD7B3FAA490}"/>
+                </a:ext>
+              </a:extLst>
+            </p:cNvPr>
+            <p:cNvSpPr txBox="1"/>
+            <p:nvPr/>
+          </p:nvSpPr>
+          <p:spPr>
+            <a:xfrm>
+              <a:off x="11668332" y="3668223"/>
+              <a:ext cx="2743200" cy="461665"/>
+            </a:xfrm>
+            <a:prstGeom prst="rect">
+              <a:avLst/>
+            </a:prstGeom>
+            <a:noFill/>
+          </p:spPr>
+          <p:txBody>
+            <a:bodyPr wrap="square">
+              <a:spAutoFit/>
+            </a:bodyPr>
+            <a:lstStyle/>
+            <a:p>
+              <a:pPr lvl="0"/>
+              <a:r>
+                <a:rPr lang="en-US" sz="2400" dirty="0"/>
+                <a:t>Rodrigue YENGO</a:t>
+              </a:r>
+            </a:p>
+          </p:txBody>
+        </p:sp>
+      </p:grpSp>
     </p:spTree>
   </p:cSld>
   <p:clrMapOvr>
@@ -2480,47 +2934,6 @@
       </p:grpSpPr>
       <p:sp>
         <p:nvSpPr>
-          <p:cNvPr id="2" name="Shape 0"/>
-          <p:cNvSpPr/>
-          <p:nvPr/>
-        </p:nvSpPr>
-        <p:spPr>
-          <a:xfrm>
-            <a:off x="0" y="0"/>
-            <a:ext cx="18288000" cy="10287000"/>
-          </a:xfrm>
-          <a:prstGeom prst="rect">
-            <a:avLst/>
-          </a:prstGeom>
-          <a:gradFill rotWithShape="1">
-            <a:gsLst>
-              <a:gs pos="0">
-                <a:srgbClr val="2B2741">
-                  <a:alpha val="75000"/>
-                </a:srgbClr>
-              </a:gs>
-              <a:gs pos="58000">
-                <a:srgbClr val="2B2741">
-                  <a:alpha val="0"/>
-                </a:srgbClr>
-              </a:gs>
-            </a:gsLst>
-            <a:path path="circle">
-              <a:fillToRect l="80000" r="20000" b="100000"/>
-            </a:path>
-          </a:gradFill>
-          <a:ln/>
-        </p:spPr>
-        <p:txBody>
-          <a:bodyPr/>
-          <a:lstStyle/>
-          <a:p>
-            <a:endParaRPr lang="en-GB"/>
-          </a:p>
-        </p:txBody>
-      </p:sp>
-      <p:sp>
-        <p:nvSpPr>
           <p:cNvPr id="4" name="Text 2"/>
           <p:cNvSpPr/>
           <p:nvPr/>
@@ -2860,30 +3273,6 @@
           </a:p>
         </p:txBody>
       </p:sp>
-      <p:pic>
-        <p:nvPicPr>
-          <p:cNvPr id="8" name="Image 0" descr="preencoded.png"/>
-          <p:cNvPicPr>
-            <a:picLocks noChangeAspect="1"/>
-          </p:cNvPicPr>
-          <p:nvPr/>
-        </p:nvPicPr>
-        <p:blipFill>
-          <a:blip r:embed="rId3"/>
-          <a:stretch>
-            <a:fillRect/>
-          </a:stretch>
-        </p:blipFill>
-        <p:spPr>
-          <a:xfrm>
-            <a:off x="11167765" y="9867900"/>
-            <a:ext cx="5977235" cy="152400"/>
-          </a:xfrm>
-          <a:prstGeom prst="rect">
-            <a:avLst/>
-          </a:prstGeom>
-        </p:spPr>
-      </p:pic>
     </p:spTree>
   </p:cSld>
   <p:clrMapOvr>
@@ -2919,47 +3308,6 @@
       </p:grpSpPr>
       <p:sp>
         <p:nvSpPr>
-          <p:cNvPr id="2" name="Shape 0"/>
-          <p:cNvSpPr/>
-          <p:nvPr/>
-        </p:nvSpPr>
-        <p:spPr>
-          <a:xfrm>
-            <a:off x="0" y="0"/>
-            <a:ext cx="18288000" cy="10287000"/>
-          </a:xfrm>
-          <a:prstGeom prst="rect">
-            <a:avLst/>
-          </a:prstGeom>
-          <a:gradFill rotWithShape="1">
-            <a:gsLst>
-              <a:gs pos="0">
-                <a:srgbClr val="2B2741">
-                  <a:alpha val="75000"/>
-                </a:srgbClr>
-              </a:gs>
-              <a:gs pos="58000">
-                <a:srgbClr val="2B2741">
-                  <a:alpha val="0"/>
-                </a:srgbClr>
-              </a:gs>
-            </a:gsLst>
-            <a:path path="circle">
-              <a:fillToRect l="80000" r="20000" b="100000"/>
-            </a:path>
-          </a:gradFill>
-          <a:ln/>
-        </p:spPr>
-        <p:txBody>
-          <a:bodyPr/>
-          <a:lstStyle/>
-          <a:p>
-            <a:endParaRPr lang="en-GB"/>
-          </a:p>
-        </p:txBody>
-      </p:sp>
-      <p:sp>
-        <p:nvSpPr>
           <p:cNvPr id="4" name="Text 2"/>
           <p:cNvSpPr/>
           <p:nvPr/>
@@ -3266,30 +3614,6 @@
           </a:p>
         </p:txBody>
       </p:sp>
-      <p:pic>
-        <p:nvPicPr>
-          <p:cNvPr id="11" name="Image 0" descr="preencoded.png"/>
-          <p:cNvPicPr>
-            <a:picLocks noChangeAspect="1"/>
-          </p:cNvPicPr>
-          <p:nvPr/>
-        </p:nvPicPr>
-        <p:blipFill>
-          <a:blip r:embed="rId3"/>
-          <a:stretch>
-            <a:fillRect/>
-          </a:stretch>
-        </p:blipFill>
-        <p:spPr>
-          <a:xfrm>
-            <a:off x="11167765" y="9867900"/>
-            <a:ext cx="5977235" cy="152400"/>
-          </a:xfrm>
-          <a:prstGeom prst="rect">
-            <a:avLst/>
-          </a:prstGeom>
-        </p:spPr>
-      </p:pic>
     </p:spTree>
   </p:cSld>
   <p:clrMapOvr>
@@ -3325,47 +3649,6 @@
       </p:grpSpPr>
       <p:sp>
         <p:nvSpPr>
-          <p:cNvPr id="2" name="Shape 0"/>
-          <p:cNvSpPr/>
-          <p:nvPr/>
-        </p:nvSpPr>
-        <p:spPr>
-          <a:xfrm>
-            <a:off x="0" y="0"/>
-            <a:ext cx="18288000" cy="10287000"/>
-          </a:xfrm>
-          <a:prstGeom prst="rect">
-            <a:avLst/>
-          </a:prstGeom>
-          <a:gradFill rotWithShape="1">
-            <a:gsLst>
-              <a:gs pos="0">
-                <a:srgbClr val="2B2741">
-                  <a:alpha val="75000"/>
-                </a:srgbClr>
-              </a:gs>
-              <a:gs pos="58000">
-                <a:srgbClr val="2B2741">
-                  <a:alpha val="0"/>
-                </a:srgbClr>
-              </a:gs>
-            </a:gsLst>
-            <a:path path="circle">
-              <a:fillToRect l="80000" r="20000" b="100000"/>
-            </a:path>
-          </a:gradFill>
-          <a:ln/>
-        </p:spPr>
-        <p:txBody>
-          <a:bodyPr/>
-          <a:lstStyle/>
-          <a:p>
-            <a:endParaRPr lang="en-GB"/>
-          </a:p>
-        </p:txBody>
-      </p:sp>
-      <p:sp>
-        <p:nvSpPr>
           <p:cNvPr id="4" name="Text 2"/>
           <p:cNvSpPr/>
           <p:nvPr/>
@@ -3615,47 +3898,6 @@
       </p:grpSpPr>
       <p:sp>
         <p:nvSpPr>
-          <p:cNvPr id="2" name="Shape 0"/>
-          <p:cNvSpPr/>
-          <p:nvPr/>
-        </p:nvSpPr>
-        <p:spPr>
-          <a:xfrm>
-            <a:off x="0" y="0"/>
-            <a:ext cx="18288000" cy="10287000"/>
-          </a:xfrm>
-          <a:prstGeom prst="rect">
-            <a:avLst/>
-          </a:prstGeom>
-          <a:gradFill rotWithShape="1">
-            <a:gsLst>
-              <a:gs pos="0">
-                <a:srgbClr val="2B2741">
-                  <a:alpha val="75000"/>
-                </a:srgbClr>
-              </a:gs>
-              <a:gs pos="58000">
-                <a:srgbClr val="2B2741">
-                  <a:alpha val="0"/>
-                </a:srgbClr>
-              </a:gs>
-            </a:gsLst>
-            <a:path path="circle">
-              <a:fillToRect l="80000" r="20000" b="100000"/>
-            </a:path>
-          </a:gradFill>
-          <a:ln/>
-        </p:spPr>
-        <p:txBody>
-          <a:bodyPr/>
-          <a:lstStyle/>
-          <a:p>
-            <a:endParaRPr lang="en-GB"/>
-          </a:p>
-        </p:txBody>
-      </p:sp>
-      <p:sp>
-        <p:nvSpPr>
           <p:cNvPr id="4" name="Text 2"/>
           <p:cNvSpPr/>
           <p:nvPr/>
@@ -4047,30 +4289,6 @@
           </a:p>
         </p:txBody>
       </p:sp>
-      <p:pic>
-        <p:nvPicPr>
-          <p:cNvPr id="14" name="Image 0" descr="preencoded.png"/>
-          <p:cNvPicPr>
-            <a:picLocks noChangeAspect="1"/>
-          </p:cNvPicPr>
-          <p:nvPr/>
-        </p:nvPicPr>
-        <p:blipFill>
-          <a:blip r:embed="rId3"/>
-          <a:stretch>
-            <a:fillRect/>
-          </a:stretch>
-        </p:blipFill>
-        <p:spPr>
-          <a:xfrm>
-            <a:off x="11167765" y="9867900"/>
-            <a:ext cx="5977235" cy="152400"/>
-          </a:xfrm>
-          <a:prstGeom prst="rect">
-            <a:avLst/>
-          </a:prstGeom>
-        </p:spPr>
-      </p:pic>
     </p:spTree>
   </p:cSld>
   <p:clrMapOvr>
@@ -4293,30 +4511,6 @@
           </a:p>
         </p:txBody>
       </p:sp>
-      <p:pic>
-        <p:nvPicPr>
-          <p:cNvPr id="6" name="Image 0" descr="preencoded.png"/>
-          <p:cNvPicPr>
-            <a:picLocks noChangeAspect="1"/>
-          </p:cNvPicPr>
-          <p:nvPr/>
-        </p:nvPicPr>
-        <p:blipFill>
-          <a:blip r:embed="rId3"/>
-          <a:stretch>
-            <a:fillRect/>
-          </a:stretch>
-        </p:blipFill>
-        <p:spPr>
-          <a:xfrm>
-            <a:off x="11167765" y="9867900"/>
-            <a:ext cx="5977235" cy="152400"/>
-          </a:xfrm>
-          <a:prstGeom prst="rect">
-            <a:avLst/>
-          </a:prstGeom>
-        </p:spPr>
-      </p:pic>
     </p:spTree>
   </p:cSld>
   <p:clrMapOvr>
@@ -4350,47 +4544,6 @@
           <a:chExt cx="0" cy="0"/>
         </a:xfrm>
       </p:grpSpPr>
-      <p:sp>
-        <p:nvSpPr>
-          <p:cNvPr id="2" name="Shape 0"/>
-          <p:cNvSpPr/>
-          <p:nvPr/>
-        </p:nvSpPr>
-        <p:spPr>
-          <a:xfrm>
-            <a:off x="0" y="0"/>
-            <a:ext cx="18288000" cy="10287000"/>
-          </a:xfrm>
-          <a:prstGeom prst="rect">
-            <a:avLst/>
-          </a:prstGeom>
-          <a:gradFill rotWithShape="1">
-            <a:gsLst>
-              <a:gs pos="0">
-                <a:srgbClr val="353A80">
-                  <a:alpha val="70000"/>
-                </a:srgbClr>
-              </a:gs>
-              <a:gs pos="64000">
-                <a:srgbClr val="353A80">
-                  <a:alpha val="0"/>
-                </a:srgbClr>
-              </a:gs>
-            </a:gsLst>
-            <a:path path="circle">
-              <a:fillToRect l="22000" t="42000" r="78000" b="58000"/>
-            </a:path>
-          </a:gradFill>
-          <a:ln/>
-        </p:spPr>
-        <p:txBody>
-          <a:bodyPr/>
-          <a:lstStyle/>
-          <a:p>
-            <a:endParaRPr lang="en-GB"/>
-          </a:p>
-        </p:txBody>
-      </p:sp>
       <p:sp>
         <p:nvSpPr>
           <p:cNvPr id="3" name="Text 1"/>
@@ -5142,19 +5295,17 @@
 </file>
 
 <file path=customXml/item1.xml><?xml version="1.0" encoding="utf-8"?>
-<p:properties xmlns:p="http://schemas.microsoft.com/office/2006/metadata/properties" xmlns:xsi="http://www.w3.org/2001/XMLSchema-instance" xmlns:pc="http://schemas.microsoft.com/office/infopath/2007/PartnerControls">
-  <documentManagement>
-    <TaxCatchAll xmlns="33363a87-7e43-46da-9332-4c6d176b06e4" xsi:nil="true"/>
-    <lcf76f155ced4ddcb4097134ff3c332f xmlns="d9df9240-fc95-4deb-9c9d-de700c44a7a7">
-      <Terms xmlns="http://schemas.microsoft.com/office/infopath/2007/PartnerControls"/>
-    </lcf76f155ced4ddcb4097134ff3c332f>
-  </documentManagement>
-</p:properties>
+<?mso-contentType ?>
+<FormTemplates xmlns="http://schemas.microsoft.com/sharepoint/v3/contenttype/forms">
+  <Display>DocumentLibraryForm</Display>
+  <Edit>DocumentLibraryForm</Edit>
+  <New>DocumentLibraryForm</New>
+</FormTemplates>
 </file>
 
 <file path=customXml/item2.xml><?xml version="1.0" encoding="utf-8"?>
-<ct:contentTypeSchema xmlns:ct="http://schemas.microsoft.com/office/2006/metadata/contentType" xmlns:ma="http://schemas.microsoft.com/office/2006/metadata/properties/metaAttributes" ct:_="" ma:_="" ma:contentTypeName="Document" ma:contentTypeID="0x0101000085964E25350F4FB3FE643AE11B2B20" ma:contentTypeVersion="10" ma:contentTypeDescription="Crée un document." ma:contentTypeScope="" ma:versionID="ce288966c27ce7b3e7a9f8d1d4c0f960">
-  <xsd:schema xmlns:xsd="http://www.w3.org/2001/XMLSchema" xmlns:xs="http://www.w3.org/2001/XMLSchema" xmlns:p="http://schemas.microsoft.com/office/2006/metadata/properties" xmlns:ns2="d9df9240-fc95-4deb-9c9d-de700c44a7a7" xmlns:ns3="33363a87-7e43-46da-9332-4c6d176b06e4" targetNamespace="http://schemas.microsoft.com/office/2006/metadata/properties" ma:root="true" ma:fieldsID="ee543c07c1445a444ae8fee589f454ee" ns2:_="" ns3:_="">
+<ct:contentTypeSchema xmlns:ct="http://schemas.microsoft.com/office/2006/metadata/contentType" xmlns:ma="http://schemas.microsoft.com/office/2006/metadata/properties/metaAttributes" ct:_="" ma:_="" ma:contentTypeName="Document" ma:contentTypeID="0x0101000085964E25350F4FB3FE643AE11B2B20" ma:contentTypeVersion="10" ma:contentTypeDescription="Create a new document." ma:contentTypeScope="" ma:versionID="1e1d1b9c64e4e863bf8aa3867e361155">
+  <xsd:schema xmlns:xsd="http://www.w3.org/2001/XMLSchema" xmlns:xs="http://www.w3.org/2001/XMLSchema" xmlns:p="http://schemas.microsoft.com/office/2006/metadata/properties" xmlns:ns2="d9df9240-fc95-4deb-9c9d-de700c44a7a7" xmlns:ns3="33363a87-7e43-46da-9332-4c6d176b06e4" targetNamespace="http://schemas.microsoft.com/office/2006/metadata/properties" ma:root="true" ma:fieldsID="6f44e94be1ec4ee84c894018ce3c7098" ns2:_="" ns3:_="">
     <xsd:import namespace="d9df9240-fc95-4deb-9c9d-de700c44a7a7"/>
     <xsd:import namespace="33363a87-7e43-46da-9332-4c6d176b06e4"/>
     <xsd:element name="properties">
@@ -5202,7 +5353,7 @@
         <xsd:restriction base="dms:Text"/>
       </xsd:simpleType>
     </xsd:element>
-    <xsd:element name="lcf76f155ced4ddcb4097134ff3c332f" ma:index="13" nillable="true" ma:taxonomy="true" ma:internalName="lcf76f155ced4ddcb4097134ff3c332f" ma:taxonomyFieldName="MediaServiceImageTags" ma:displayName="Balises d’images" ma:readOnly="false" ma:fieldId="{5cf76f15-5ced-4ddc-b409-7134ff3c332f}" ma:taxonomyMulti="true" ma:sspId="4ef1542d-73bf-4483-a10a-dd7f0542ff0d" ma:termSetId="09814cd3-568e-fe90-9814-8d621ff8fb84" ma:anchorId="fba54fb3-c3e1-fe81-a776-ca4b69148c4d" ma:open="true" ma:isKeyword="false">
+    <xsd:element name="lcf76f155ced4ddcb4097134ff3c332f" ma:index="13" nillable="true" ma:taxonomy="true" ma:internalName="lcf76f155ced4ddcb4097134ff3c332f" ma:taxonomyFieldName="MediaServiceImageTags" ma:displayName="Image Tags" ma:readOnly="false" ma:fieldId="{5cf76f15-5ced-4ddc-b409-7134ff3c332f}" ma:taxonomyMulti="true" ma:sspId="4ef1542d-73bf-4483-a10a-dd7f0542ff0d" ma:termSetId="09814cd3-568e-fe90-9814-8d621ff8fb84" ma:anchorId="fba54fb3-c3e1-fe81-a776-ca4b69148c4d" ma:open="true" ma:isKeyword="false">
       <xsd:complexType>
         <xsd:sequence>
           <xsd:element ref="pc:Terms" minOccurs="0" maxOccurs="1"/>
@@ -5251,8 +5402,8 @@
         <xsd:element ref="dc:creator" minOccurs="0" maxOccurs="1"/>
         <xsd:element ref="dcterms:created" minOccurs="0" maxOccurs="1"/>
         <xsd:element ref="dc:identifier" minOccurs="0" maxOccurs="1"/>
-        <xsd:element name="contentType" minOccurs="0" maxOccurs="1" type="xsd:string" ma:index="0" ma:displayName="Type de contenu"/>
-        <xsd:element ref="dc:title" minOccurs="0" maxOccurs="1" ma:index="4" ma:displayName="Titre"/>
+        <xsd:element name="contentType" minOccurs="0" maxOccurs="1" type="xsd:string" ma:index="0" ma:displayName="Content Type"/>
+        <xsd:element ref="dc:title" minOccurs="0" maxOccurs="1" ma:index="4" ma:displayName="Title"/>
         <xsd:element ref="dc:subject" minOccurs="0" maxOccurs="1"/>
         <xsd:element ref="dc:description" minOccurs="0" maxOccurs="1"/>
         <xsd:element name="keywords" minOccurs="0" maxOccurs="1" type="xsd:string"/>
@@ -5342,15 +5493,29 @@
 </file>
 
 <file path=customXml/item3.xml><?xml version="1.0" encoding="utf-8"?>
-<?mso-contentType ?>
-<FormTemplates xmlns="http://schemas.microsoft.com/sharepoint/v3/contenttype/forms">
-  <Display>DocumentLibraryForm</Display>
-  <Edit>DocumentLibraryForm</Edit>
-  <New>DocumentLibraryForm</New>
-</FormTemplates>
+<p:properties xmlns:p="http://schemas.microsoft.com/office/2006/metadata/properties" xmlns:xsi="http://www.w3.org/2001/XMLSchema-instance" xmlns:pc="http://schemas.microsoft.com/office/infopath/2007/PartnerControls">
+  <documentManagement>
+    <TaxCatchAll xmlns="33363a87-7e43-46da-9332-4c6d176b06e4" xsi:nil="true"/>
+    <lcf76f155ced4ddcb4097134ff3c332f xmlns="d9df9240-fc95-4deb-9c9d-de700c44a7a7">
+      <Terms xmlns="http://schemas.microsoft.com/office/infopath/2007/PartnerControls"/>
+    </lcf76f155ced4ddcb4097134ff3c332f>
+  </documentManagement>
+</p:properties>
 </file>
 
 <file path=customXml/itemProps1.xml><?xml version="1.0" encoding="utf-8"?>
+<ds:datastoreItem xmlns:ds="http://schemas.openxmlformats.org/officeDocument/2006/customXml" ds:itemID="{DE1C48D6-9654-4A3A-AD24-18DEC151F259}">
+  <ds:schemaRefs>
+    <ds:schemaRef ds:uri="http://schemas.microsoft.com/sharepoint/v3/contenttype/forms"/>
+  </ds:schemaRefs>
+</ds:datastoreItem>
+</file>
+
+<file path=customXml/itemProps2.xml><?xml version="1.0" encoding="utf-8"?>
+<ds:datastoreItem xmlns:ds="http://schemas.openxmlformats.org/officeDocument/2006/customXml" ds:itemID="{63E6637D-1E6C-4CAF-8F8D-80E37FD259B7}"/>
+</file>
+
+<file path=customXml/itemProps3.xml><?xml version="1.0" encoding="utf-8"?>
 <ds:datastoreItem xmlns:ds="http://schemas.openxmlformats.org/officeDocument/2006/customXml" ds:itemID="{C3B0E93F-0524-4D6B-AD32-A8DFF630B537}">
   <ds:schemaRefs>
     <ds:schemaRef ds:uri="http://purl.org/dc/dcmitype/"/>
@@ -5367,18 +5532,6 @@
 </ds:datastoreItem>
 </file>
 
-<file path=customXml/itemProps2.xml><?xml version="1.0" encoding="utf-8"?>
-<ds:datastoreItem xmlns:ds="http://schemas.openxmlformats.org/officeDocument/2006/customXml" ds:itemID="{5F906DC3-C574-439B-9FC8-9CE2782D2693}"/>
-</file>
-
-<file path=customXml/itemProps3.xml><?xml version="1.0" encoding="utf-8"?>
-<ds:datastoreItem xmlns:ds="http://schemas.openxmlformats.org/officeDocument/2006/customXml" ds:itemID="{DE1C48D6-9654-4A3A-AD24-18DEC151F259}">
-  <ds:schemaRefs>
-    <ds:schemaRef ds:uri="http://schemas.microsoft.com/sharepoint/v3/contenttype/forms"/>
-  </ds:schemaRefs>
-</ds:datastoreItem>
-</file>
-
 <file path=docMetadata/LabelInfo.xml><?xml version="1.0" encoding="utf-8"?>
 <clbl:labelList xmlns:clbl="http://schemas.microsoft.com/office/2020/mipLabelMetadata">
   <clbl:label id="{defa4170-0d19-0005-0004-bc88714345d2}" enabled="1" method="Standard" siteId="{ffe9cb1d-3ae5-460e-857d-cc6afe98ae68}" removed="0"/>
